--- a/ASL_ComputerVision.pptx
+++ b/ASL_ComputerVision.pptx
@@ -6840,9 +6840,8 @@
                 <a:ea typeface="Calibri" pitchFamily="34" charset="-122"/>
                 <a:cs typeface="Calibri" pitchFamily="34" charset="-120"/>
               </a:rPr>
-              <a:t>By combining multiple Kaggle datasets (Sign Language MNIST, ASL Alphabet, and ASL Digits), we were able to build a model that covers all standard ASL hand signs, not just the alphabet</a:t>
-            </a:r>
-            <a:endParaRPr lang="en-US" sz="1600" dirty="0"/>
+              <a:t>By combining multiple Kaggle datasets (Sign Language MNIST, ASL Alphabet, and ASL Digits), we were able to build a model that covers all standard static ASL hand signs</a:t>
+            </a:r>
           </a:p>
           <a:p>
             <a:pPr marL="342900" indent="-342900">
@@ -6861,7 +6860,7 @@
                 <a:ea typeface="Calibri" pitchFamily="34" charset="-122"/>
                 <a:cs typeface="Calibri" pitchFamily="34" charset="-120"/>
               </a:rPr>
-              <a:t>The modular design means you can improve individual classes by collecting more data with append_new_data.py and retraining, without having to start over from scratch</a:t>
+              <a:t>The modular design allows you to improve individual classes by collecting more data with append_new_data.py and retraining, without having to start over from scratch</a:t>
             </a:r>
             <a:endParaRPr lang="en-US" sz="1600" dirty="0"/>
           </a:p>
@@ -6882,7 +6881,7 @@
                 <a:ea typeface="Calibri" pitchFamily="34" charset="-122"/>
                 <a:cs typeface="Calibri" pitchFamily="34" charset="-120"/>
               </a:rPr>
-              <a:t>Beyond the technical side, projects like this have real potential in healthcare and accessibility. Real-time sign language detection could help bridge communication gaps for Deaf and hard-of-hearing individuals</a:t>
+              <a:t>Beyond the technical side, projects like this have real potential in healthcare and accessibility. Real-time sign language detection helps bridge communication gaps for Deaf and hard-of-hearing individuals</a:t>
             </a:r>
             <a:endParaRPr lang="en-US" sz="1600" dirty="0"/>
           </a:p>
@@ -7015,7 +7014,7 @@
             <a:r>
               <a:rPr lang="en-US" sz="1600" b="1" dirty="0">
                 <a:solidFill>
-                  <a:srgbClr val="D0D0D0"/>
+                  <a:schemeClr val="bg1"/>
                 </a:solidFill>
                 <a:latin typeface="Calibri" pitchFamily="34" charset="0"/>
                 <a:ea typeface="Calibri" pitchFamily="34" charset="-122"/>
@@ -7036,7 +7035,7 @@
             <a:r>
               <a:rPr lang="en-US" sz="1600" b="1" dirty="0">
                 <a:solidFill>
-                  <a:srgbClr val="FFFFFF"/>
+                  <a:schemeClr val="bg1"/>
                 </a:solidFill>
                 <a:latin typeface="Georgia" pitchFamily="34" charset="0"/>
                 <a:ea typeface="Georgia" pitchFamily="34" charset="-122"/>
@@ -7046,7 +7045,7 @@
             </a:r>
             <a:endParaRPr lang="en-US" sz="1600" dirty="0">
               <a:solidFill>
-                <a:srgbClr val="D0D0D0"/>
+                <a:schemeClr val="bg1"/>
               </a:solidFill>
               <a:latin typeface="Calibri" pitchFamily="34" charset="0"/>
               <a:ea typeface="Calibri" pitchFamily="34" charset="-122"/>
@@ -7064,18 +7063,24 @@
             <a:r>
               <a:rPr lang="en-US" sz="1600" dirty="0">
                 <a:solidFill>
-                  <a:srgbClr val="D0D0D0"/>
+                  <a:schemeClr val="bg1"/>
                 </a:solidFill>
                 <a:latin typeface="Calibri" pitchFamily="34" charset="0"/>
                 <a:ea typeface="Calibri" pitchFamily="34" charset="-122"/>
                 <a:cs typeface="Calibri" pitchFamily="34" charset="-120"/>
-                <a:hlinkClick r:id="rId4"/>
+                <a:hlinkClick r:id="rId4">
+                  <a:extLst>
+                    <a:ext uri="{A12FA001-AC4F-418D-AE19-62706E023703}">
+                      <ahyp:hlinkClr xmlns:ahyp="http://schemas.microsoft.com/office/drawing/2018/hyperlinkcolor" val="tx"/>
+                    </a:ext>
+                  </a:extLst>
+                </a:hlinkClick>
               </a:rPr>
               <a:t>https://www.kaggle.com/datasets/datamunge/sign-language-mnist</a:t>
             </a:r>
             <a:endParaRPr lang="en-US" sz="1600" dirty="0">
               <a:solidFill>
-                <a:srgbClr val="D0D0D0"/>
+                <a:schemeClr val="bg1"/>
               </a:solidFill>
               <a:latin typeface="Calibri" pitchFamily="34" charset="0"/>
               <a:ea typeface="Calibri" pitchFamily="34" charset="-122"/>
@@ -7094,7 +7099,7 @@
             <a:r>
               <a:rPr lang="en-US" sz="1600" b="1" dirty="0">
                 <a:solidFill>
-                  <a:srgbClr val="FFFFFF"/>
+                  <a:schemeClr val="bg1"/>
                 </a:solidFill>
                 <a:latin typeface="Georgia" pitchFamily="34" charset="0"/>
                 <a:ea typeface="Georgia" pitchFamily="34" charset="-122"/>
@@ -7114,12 +7119,25 @@
             </a:pPr>
             <a:r>
               <a:rPr lang="en-US" sz="1600" dirty="0">
-                <a:hlinkClick r:id="rId5"/>
+                <a:solidFill>
+                  <a:schemeClr val="bg1"/>
+                </a:solidFill>
+                <a:hlinkClick r:id="rId5">
+                  <a:extLst>
+                    <a:ext uri="{A12FA001-AC4F-418D-AE19-62706E023703}">
+                      <ahyp:hlinkClr xmlns:ahyp="http://schemas.microsoft.com/office/drawing/2018/hyperlinkcolor" val="tx"/>
+                    </a:ext>
+                  </a:extLst>
+                </a:hlinkClick>
               </a:rPr>
               <a:t>https://www.kaggle.com/datasets/grassknoted/asl-alphabet</a:t>
             </a:r>
             <a:r>
-              <a:rPr lang="en-US" sz="1600" dirty="0"/>
+              <a:rPr lang="en-US" sz="1600" dirty="0">
+                <a:solidFill>
+                  <a:schemeClr val="bg1"/>
+                </a:solidFill>
+              </a:rPr>
               <a:t> </a:t>
             </a:r>
           </a:p>
@@ -7135,7 +7153,7 @@
             <a:r>
               <a:rPr lang="en-US" sz="1600" b="1" dirty="0">
                 <a:solidFill>
-                  <a:srgbClr val="FFFFFF"/>
+                  <a:schemeClr val="bg1"/>
                 </a:solidFill>
                 <a:latin typeface="Georgia" pitchFamily="34" charset="0"/>
                 <a:ea typeface="Georgia" pitchFamily="34" charset="-122"/>
@@ -7155,12 +7173,25 @@
             </a:pPr>
             <a:r>
               <a:rPr lang="en-US" sz="1600" dirty="0">
-                <a:hlinkClick r:id="rId6"/>
+                <a:solidFill>
+                  <a:schemeClr val="bg1"/>
+                </a:solidFill>
+                <a:hlinkClick r:id="rId6">
+                  <a:extLst>
+                    <a:ext uri="{A12FA001-AC4F-418D-AE19-62706E023703}">
+                      <ahyp:hlinkClr xmlns:ahyp="http://schemas.microsoft.com/office/drawing/2018/hyperlinkcolor" val="tx"/>
+                    </a:ext>
+                  </a:extLst>
+                </a:hlinkClick>
               </a:rPr>
               <a:t>https://www.kaggle.com/datasets/victoranthony/asl-digits-0-9</a:t>
             </a:r>
             <a:r>
-              <a:rPr lang="en-US" sz="1600" dirty="0"/>
+              <a:rPr lang="en-US" sz="1600" dirty="0">
+                <a:solidFill>
+                  <a:schemeClr val="bg1"/>
+                </a:solidFill>
+              </a:rPr>
               <a:t> </a:t>
             </a:r>
           </a:p>
@@ -7174,7 +7205,7 @@
             </a:pPr>
             <a:endParaRPr lang="en-US" sz="1600" dirty="0">
               <a:solidFill>
-                <a:srgbClr val="D0D0D0"/>
+                <a:schemeClr val="bg1"/>
               </a:solidFill>
               <a:latin typeface="Calibri" pitchFamily="34" charset="0"/>
               <a:ea typeface="Calibri" pitchFamily="34" charset="-122"/>
@@ -7189,7 +7220,11 @@
               <a:buSzPct val="100000"/>
               <a:buChar char="•"/>
             </a:pPr>
-            <a:endParaRPr lang="en-US" sz="1600" dirty="0"/>
+            <a:endParaRPr lang="en-US" sz="1600" dirty="0">
+              <a:solidFill>
+                <a:schemeClr val="bg1"/>
+              </a:solidFill>
+            </a:endParaRPr>
           </a:p>
         </p:txBody>
       </p:sp>
@@ -9164,7 +9199,7 @@
                 <a:ea typeface="Calibri" pitchFamily="34" charset="-122"/>
                 <a:cs typeface="Calibri" pitchFamily="34" charset="-120"/>
               </a:rPr>
-              <a:t>These 21 points × 2 coordinates = 42 features per hand, which form the input vector for the classifier.</a:t>
+              <a:t>These 21 points × 2 coordinates = 42 features from the hand, which form the input vector for the classifier.</a:t>
             </a:r>
             <a:endParaRPr lang="en-US" sz="1600" dirty="0"/>
           </a:p>

--- a/ASL_ComputerVision.pptx
+++ b/ASL_ComputerVision.pptx
@@ -126,6 +126,65 @@
     </p:ext>
   </p:extLst>
 </p:presentation>
+</file>
+
+<file path=ppt/changesInfos/changesInfo1.xml><?xml version="1.0" encoding="utf-8"?>
+<pc:chgInfo xmlns:a="http://schemas.openxmlformats.org/drawingml/2006/main" xmlns:r="http://schemas.openxmlformats.org/officeDocument/2006/relationships" xmlns:ac="http://schemas.microsoft.com/office/drawing/2013/main/command" xmlns:pc="http://schemas.microsoft.com/office/powerpoint/2013/main/command">
+  <pc:docChgLst>
+    <pc:chgData name="Jaden Randolph" userId="501b3245b602854f" providerId="LiveId" clId="{7ACE3E2D-AB90-402A-B432-C30FE0C7A576}"/>
+    <pc:docChg chg="modSld">
+      <pc:chgData name="Jaden Randolph" userId="501b3245b602854f" providerId="LiveId" clId="{7ACE3E2D-AB90-402A-B432-C30FE0C7A576}" dt="2026-05-01T13:23:51.746" v="50" actId="20577"/>
+      <pc:docMkLst>
+        <pc:docMk/>
+      </pc:docMkLst>
+      <pc:sldChg chg="modSp mod">
+        <pc:chgData name="Jaden Randolph" userId="501b3245b602854f" providerId="LiveId" clId="{7ACE3E2D-AB90-402A-B432-C30FE0C7A576}" dt="2026-05-01T13:22:57.613" v="17" actId="20577"/>
+        <pc:sldMkLst>
+          <pc:docMk/>
+          <pc:sldMk cId="0" sldId="261"/>
+        </pc:sldMkLst>
+        <pc:spChg chg="mod">
+          <ac:chgData name="Jaden Randolph" userId="501b3245b602854f" providerId="LiveId" clId="{7ACE3E2D-AB90-402A-B432-C30FE0C7A576}" dt="2026-05-01T13:22:57.613" v="17" actId="20577"/>
+          <ac:spMkLst>
+            <pc:docMk/>
+            <pc:sldMk cId="0" sldId="261"/>
+            <ac:spMk id="3" creationId="{00000000-0000-0000-0000-000000000000}"/>
+          </ac:spMkLst>
+        </pc:spChg>
+      </pc:sldChg>
+      <pc:sldChg chg="modSp mod">
+        <pc:chgData name="Jaden Randolph" userId="501b3245b602854f" providerId="LiveId" clId="{7ACE3E2D-AB90-402A-B432-C30FE0C7A576}" dt="2026-05-01T13:23:32.115" v="43" actId="20577"/>
+        <pc:sldMkLst>
+          <pc:docMk/>
+          <pc:sldMk cId="0" sldId="262"/>
+        </pc:sldMkLst>
+        <pc:spChg chg="mod">
+          <ac:chgData name="Jaden Randolph" userId="501b3245b602854f" providerId="LiveId" clId="{7ACE3E2D-AB90-402A-B432-C30FE0C7A576}" dt="2026-05-01T13:23:32.115" v="43" actId="20577"/>
+          <ac:spMkLst>
+            <pc:docMk/>
+            <pc:sldMk cId="0" sldId="262"/>
+            <ac:spMk id="3" creationId="{00000000-0000-0000-0000-000000000000}"/>
+          </ac:spMkLst>
+        </pc:spChg>
+      </pc:sldChg>
+      <pc:sldChg chg="modSp mod">
+        <pc:chgData name="Jaden Randolph" userId="501b3245b602854f" providerId="LiveId" clId="{7ACE3E2D-AB90-402A-B432-C30FE0C7A576}" dt="2026-05-01T13:23:51.746" v="50" actId="20577"/>
+        <pc:sldMkLst>
+          <pc:docMk/>
+          <pc:sldMk cId="0" sldId="263"/>
+        </pc:sldMkLst>
+        <pc:spChg chg="mod">
+          <ac:chgData name="Jaden Randolph" userId="501b3245b602854f" providerId="LiveId" clId="{7ACE3E2D-AB90-402A-B432-C30FE0C7A576}" dt="2026-05-01T13:23:51.746" v="50" actId="20577"/>
+          <ac:spMkLst>
+            <pc:docMk/>
+            <pc:sldMk cId="0" sldId="263"/>
+            <ac:spMk id="3" creationId="{00000000-0000-0000-0000-000000000000}"/>
+          </ac:spMkLst>
+        </pc:spChg>
+      </pc:sldChg>
+    </pc:docChg>
+  </pc:docChgLst>
+</pc:chgInfo>
 </file>
 
 <file path=ppt/notesMasters/notesMaster1.xml><?xml version="1.0" encoding="utf-8"?>
@@ -8614,7 +8673,7 @@
                 <a:ea typeface="Calibri" pitchFamily="34" charset="-122"/>
                 <a:cs typeface="Calibri" pitchFamily="34" charset="-120"/>
               </a:rPr>
-              <a:t>American Sign Language (ASL) is a complete, natural language with its own grammar and syntax. </a:t>
+              <a:t>American Sign Language (ASL) is a complete language with its own grammar and syntax. </a:t>
             </a:r>
           </a:p>
           <a:p>
@@ -8655,7 +8714,7 @@
                 <a:ea typeface="Calibri" pitchFamily="34" charset="-122"/>
                 <a:cs typeface="Calibri" pitchFamily="34" charset="-120"/>
               </a:rPr>
-              <a:t>The ASL fingerspelling alphabet has 26 letters. Most are static hand shapes, but J and Z require motion, which makes them harder to detect from a single frame</a:t>
+              <a:t>The ASL fingerspelling alphabet has 26 letters. Most are static hand shapes, but J and Z require motion, which makes them impossible to detect from a single frame</a:t>
             </a:r>
             <a:endParaRPr lang="en-US" sz="1600" dirty="0"/>
           </a:p>
@@ -8793,7 +8852,7 @@
                 <a:ea typeface="Calibri" pitchFamily="34" charset="-122"/>
                 <a:cs typeface="Calibri" pitchFamily="34" charset="-120"/>
               </a:rPr>
-              <a:t>To build a model that covers both letters and numbers, we combined data from multiple Kaggle datasets:</a:t>
+              <a:t>To build a model that covers both letters and numbers, we combined data from multiple Kaggle datasets as well as our own images:</a:t>
             </a:r>
             <a:endParaRPr lang="en-US" sz="1600" dirty="0"/>
           </a:p>
@@ -9157,7 +9216,7 @@
                 <a:ea typeface="Calibri" pitchFamily="34" charset="-122"/>
                 <a:cs typeface="Calibri" pitchFamily="34" charset="-120"/>
               </a:rPr>
-              <a:t>MediaPipe detects 21 key points on each hand: the wrist, plus additional joints for each of the five fingers</a:t>
+              <a:t>MediaPipe detects 21 key points on the hand: the wrist, plus additional joints for each of the five fingers</a:t>
             </a:r>
             <a:endParaRPr lang="en-US" sz="1600" dirty="0"/>
           </a:p>
